--- a/Slides/Week03/06：偏見與問題.pptx
+++ b/Slides/Week03/06：偏見與問題.pptx
@@ -201,7 +201,7 @@
           <a:p>
             <a:fld id="{DF2768FB-F680-46BA-8721-EBD5055783A4}" type="datetimeFigureOut">
               <a:rPr lang="zh-TW" altLang="en-US" smtClean="0"/>
-              <a:t>2024/3/29</a:t>
+              <a:t>2024/12/4</a:t>
             </a:fld>
             <a:endParaRPr lang="zh-TW" altLang="en-US"/>
           </a:p>
@@ -872,7 +872,7 @@
           <a:p>
             <a:fld id="{0495B665-C8E0-4414-8FEF-82ED686654F1}" type="datetimeFigureOut">
               <a:rPr lang="zh-TW" altLang="en-US" smtClean="0"/>
-              <a:t>2024/3/29</a:t>
+              <a:t>2024/12/4</a:t>
             </a:fld>
             <a:endParaRPr lang="zh-TW" altLang="en-US"/>
           </a:p>
@@ -1070,7 +1070,7 @@
           <a:p>
             <a:fld id="{0495B665-C8E0-4414-8FEF-82ED686654F1}" type="datetimeFigureOut">
               <a:rPr lang="zh-TW" altLang="en-US" smtClean="0"/>
-              <a:t>2024/3/29</a:t>
+              <a:t>2024/12/4</a:t>
             </a:fld>
             <a:endParaRPr lang="zh-TW" altLang="en-US"/>
           </a:p>
@@ -1278,7 +1278,7 @@
           <a:p>
             <a:fld id="{0495B665-C8E0-4414-8FEF-82ED686654F1}" type="datetimeFigureOut">
               <a:rPr lang="zh-TW" altLang="en-US" smtClean="0"/>
-              <a:t>2024/3/29</a:t>
+              <a:t>2024/12/4</a:t>
             </a:fld>
             <a:endParaRPr lang="zh-TW" altLang="en-US"/>
           </a:p>
@@ -1659,7 +1659,7 @@
                 </a:solidFill>
               </a:rPr>
               <a:pPr/>
-              <a:t>3/29/2024</a:t>
+              <a:t>12/4/2024</a:t>
             </a:fld>
             <a:endParaRPr kumimoji="0" lang="en-US" dirty="0"/>
           </a:p>
@@ -1890,7 +1890,7 @@
                 </a:solidFill>
               </a:rPr>
               <a:pPr/>
-              <a:t>3/29/2024</a:t>
+              <a:t>12/4/2024</a:t>
             </a:fld>
             <a:endParaRPr kumimoji="0" lang="en-US" dirty="0"/>
           </a:p>
@@ -2123,7 +2123,7 @@
                 </a:solidFill>
               </a:rPr>
               <a:pPr/>
-              <a:t>3/29/2024</a:t>
+              <a:t>12/4/2024</a:t>
             </a:fld>
             <a:endParaRPr kumimoji="0" lang="en-US" dirty="0"/>
           </a:p>
@@ -2605,7 +2605,7 @@
                 </a:solidFill>
               </a:rPr>
               <a:pPr/>
-              <a:t>3/29/2024</a:t>
+              <a:t>12/4/2024</a:t>
             </a:fld>
             <a:endParaRPr kumimoji="0" lang="en-US" dirty="0"/>
           </a:p>
@@ -2962,7 +2962,7 @@
                 </a:solidFill>
               </a:rPr>
               <a:pPr/>
-              <a:t>3/29/2024</a:t>
+              <a:t>12/4/2024</a:t>
             </a:fld>
             <a:endParaRPr kumimoji="0" lang="en-US" dirty="0"/>
           </a:p>
@@ -3325,7 +3325,7 @@
                 </a:solidFill>
               </a:rPr>
               <a:pPr/>
-              <a:t>3/29/2024</a:t>
+              <a:t>12/4/2024</a:t>
             </a:fld>
             <a:endParaRPr kumimoji="0" lang="en-US" dirty="0"/>
           </a:p>
@@ -3635,7 +3635,7 @@
                 </a:solidFill>
               </a:rPr>
               <a:pPr/>
-              <a:t>3/29/2024</a:t>
+              <a:t>12/4/2024</a:t>
             </a:fld>
             <a:endParaRPr kumimoji="0" lang="en-US" dirty="0"/>
           </a:p>
@@ -3830,7 +3830,7 @@
           <a:p>
             <a:fld id="{0495B665-C8E0-4414-8FEF-82ED686654F1}" type="datetimeFigureOut">
               <a:rPr lang="zh-TW" altLang="en-US" smtClean="0"/>
-              <a:t>2024/3/29</a:t>
+              <a:t>2024/12/4</a:t>
             </a:fld>
             <a:endParaRPr lang="zh-TW" altLang="en-US"/>
           </a:p>
@@ -4314,7 +4314,7 @@
                 </a:solidFill>
               </a:rPr>
               <a:pPr/>
-              <a:t>3/29/2024</a:t>
+              <a:t>12/4/2024</a:t>
             </a:fld>
             <a:endParaRPr kumimoji="0" lang="en-US" dirty="0"/>
           </a:p>
@@ -4710,7 +4710,7 @@
                 </a:solidFill>
               </a:rPr>
               <a:pPr/>
-              <a:t>3/29/2024</a:t>
+              <a:t>12/4/2024</a:t>
             </a:fld>
             <a:endParaRPr kumimoji="0" lang="en-US" dirty="0"/>
           </a:p>
@@ -5050,7 +5050,7 @@
                 </a:solidFill>
               </a:rPr>
               <a:pPr/>
-              <a:t>3/29/2024</a:t>
+              <a:t>12/4/2024</a:t>
             </a:fld>
             <a:endParaRPr kumimoji="0" lang="en-US" dirty="0"/>
           </a:p>
@@ -5631,7 +5631,7 @@
                 </a:solidFill>
               </a:rPr>
               <a:pPr/>
-              <a:t>3/29/2024</a:t>
+              <a:t>12/4/2024</a:t>
             </a:fld>
             <a:endParaRPr kumimoji="0" lang="en-US" dirty="0"/>
           </a:p>
@@ -6200,7 +6200,7 @@
                 </a:solidFill>
               </a:rPr>
               <a:pPr/>
-              <a:t>3/29/2024</a:t>
+              <a:t>12/4/2024</a:t>
             </a:fld>
             <a:endParaRPr kumimoji="0" lang="en-US" dirty="0"/>
           </a:p>
@@ -6664,7 +6664,7 @@
                 </a:solidFill>
               </a:rPr>
               <a:pPr/>
-              <a:t>3/29/2024</a:t>
+              <a:t>12/4/2024</a:t>
             </a:fld>
             <a:endParaRPr kumimoji="0" lang="en-US" dirty="0"/>
           </a:p>
@@ -7093,7 +7093,7 @@
                 </a:solidFill>
               </a:rPr>
               <a:pPr/>
-              <a:t>3/29/2024</a:t>
+              <a:t>12/4/2024</a:t>
             </a:fld>
             <a:endParaRPr kumimoji="0" lang="en-US" dirty="0"/>
           </a:p>
@@ -7602,7 +7602,7 @@
                 </a:solidFill>
               </a:rPr>
               <a:pPr/>
-              <a:t>3/29/2024</a:t>
+              <a:t>12/4/2024</a:t>
             </a:fld>
             <a:endParaRPr kumimoji="0" lang="en-US" dirty="0"/>
           </a:p>
@@ -8111,7 +8111,7 @@
                 </a:solidFill>
               </a:rPr>
               <a:pPr/>
-              <a:t>3/29/2024</a:t>
+              <a:t>12/4/2024</a:t>
             </a:fld>
             <a:endParaRPr kumimoji="0" lang="en-US" dirty="0"/>
           </a:p>
@@ -8332,7 +8332,7 @@
                 </a:solidFill>
               </a:rPr>
               <a:pPr/>
-              <a:t>3/29/2024</a:t>
+              <a:t>12/4/2024</a:t>
             </a:fld>
             <a:endParaRPr kumimoji="0" lang="en-US" dirty="0"/>
           </a:p>
@@ -8604,7 +8604,7 @@
           <a:p>
             <a:fld id="{0495B665-C8E0-4414-8FEF-82ED686654F1}" type="datetimeFigureOut">
               <a:rPr lang="zh-TW" altLang="en-US" smtClean="0"/>
-              <a:t>2024/3/29</a:t>
+              <a:t>2024/12/4</a:t>
             </a:fld>
             <a:endParaRPr lang="zh-TW" altLang="en-US"/>
           </a:p>
@@ -8940,7 +8940,7 @@
                 </a:solidFill>
               </a:rPr>
               <a:pPr/>
-              <a:t>3/29/2024</a:t>
+              <a:t>12/4/2024</a:t>
             </a:fld>
             <a:endParaRPr kumimoji="0" lang="en-US" dirty="0"/>
           </a:p>
@@ -9164,7 +9164,7 @@
                 </a:solidFill>
               </a:rPr>
               <a:pPr/>
-              <a:t>3/29/2024</a:t>
+              <a:t>12/4/2024</a:t>
             </a:fld>
             <a:endParaRPr kumimoji="0" lang="en-US" dirty="0"/>
           </a:p>
@@ -9345,7 +9345,7 @@
             <a:fld id="{ACB2EC6F-6501-4E04-BD6C-A8A6CABB2C5B}" type="datetimeFigureOut">
               <a:rPr kumimoji="0" lang="en-US" smtClean="0"/>
               <a:pPr/>
-              <a:t>3/29/2024</a:t>
+              <a:t>12/4/2024</a:t>
             </a:fld>
             <a:endParaRPr kumimoji="0" lang="en-US" dirty="0"/>
           </a:p>
@@ -9629,7 +9629,7 @@
           <a:p>
             <a:fld id="{0495B665-C8E0-4414-8FEF-82ED686654F1}" type="datetimeFigureOut">
               <a:rPr lang="zh-TW" altLang="en-US" smtClean="0"/>
-              <a:t>2024/3/29</a:t>
+              <a:t>2024/12/4</a:t>
             </a:fld>
             <a:endParaRPr lang="zh-TW" altLang="en-US"/>
           </a:p>
@@ -10041,7 +10041,7 @@
           <a:p>
             <a:fld id="{0495B665-C8E0-4414-8FEF-82ED686654F1}" type="datetimeFigureOut">
               <a:rPr lang="zh-TW" altLang="en-US" smtClean="0"/>
-              <a:t>2024/3/29</a:t>
+              <a:t>2024/12/4</a:t>
             </a:fld>
             <a:endParaRPr lang="zh-TW" altLang="en-US"/>
           </a:p>
@@ -10182,7 +10182,7 @@
           <a:p>
             <a:fld id="{0495B665-C8E0-4414-8FEF-82ED686654F1}" type="datetimeFigureOut">
               <a:rPr lang="zh-TW" altLang="en-US" smtClean="0"/>
-              <a:t>2024/3/29</a:t>
+              <a:t>2024/12/4</a:t>
             </a:fld>
             <a:endParaRPr lang="zh-TW" altLang="en-US"/>
           </a:p>
@@ -10295,7 +10295,7 @@
           <a:p>
             <a:fld id="{0495B665-C8E0-4414-8FEF-82ED686654F1}" type="datetimeFigureOut">
               <a:rPr lang="zh-TW" altLang="en-US" smtClean="0"/>
-              <a:t>2024/3/29</a:t>
+              <a:t>2024/12/4</a:t>
             </a:fld>
             <a:endParaRPr lang="zh-TW" altLang="en-US"/>
           </a:p>
@@ -10606,7 +10606,7 @@
           <a:p>
             <a:fld id="{0495B665-C8E0-4414-8FEF-82ED686654F1}" type="datetimeFigureOut">
               <a:rPr lang="zh-TW" altLang="en-US" smtClean="0"/>
-              <a:t>2024/3/29</a:t>
+              <a:t>2024/12/4</a:t>
             </a:fld>
             <a:endParaRPr lang="zh-TW" altLang="en-US"/>
           </a:p>
@@ -10894,7 +10894,7 @@
           <a:p>
             <a:fld id="{0495B665-C8E0-4414-8FEF-82ED686654F1}" type="datetimeFigureOut">
               <a:rPr lang="zh-TW" altLang="en-US" smtClean="0"/>
-              <a:t>2024/3/29</a:t>
+              <a:t>2024/12/4</a:t>
             </a:fld>
             <a:endParaRPr lang="zh-TW" altLang="en-US"/>
           </a:p>
@@ -11135,7 +11135,7 @@
           <a:p>
             <a:fld id="{0495B665-C8E0-4414-8FEF-82ED686654F1}" type="datetimeFigureOut">
               <a:rPr lang="zh-TW" altLang="en-US" smtClean="0"/>
-              <a:t>2024/3/29</a:t>
+              <a:t>2024/12/4</a:t>
             </a:fld>
             <a:endParaRPr lang="zh-TW" altLang="en-US"/>
           </a:p>
@@ -11707,7 +11707,7 @@
                 </a:solidFill>
               </a:rPr>
               <a:pPr/>
-              <a:t>3/29/2024</a:t>
+              <a:t>12/4/2024</a:t>
             </a:fld>
             <a:endParaRPr kumimoji="0" lang="en-US" sz="1200" dirty="0">
               <a:solidFill>
